--- a/gakkyu/tegami/pptx/R2.pptx
+++ b/gakkyu/tegami/pptx/R2.pptx
@@ -3622,6 +3622,7 @@
               <a:srgbClr val="6AA7A7"/>
             </a:solidFill>
           </a:ln>
+          <a:effectLst/>
         </p:spPr>
         <p:style>
           <a:lnRef idx="2">
@@ -3630,7 +3631,7 @@
           <a:fillRef idx="0">
             <a:schemeClr val="accent1"/>
           </a:fillRef>
-          <a:effectRef idx="1">
+          <a:effectRef idx="0">
             <a:schemeClr val="accent1"/>
           </a:effectRef>
           <a:fontRef idx="minor">
@@ -3671,6 +3672,7 @@
                 <a:srgbClr val="6AA7A7"/>
               </a:solidFill>
             </a:ln>
+            <a:effectLst/>
           </p:spPr>
           <p:style>
             <a:lnRef idx="2">
@@ -3679,7 +3681,7 @@
             <a:fillRef idx="0">
               <a:schemeClr val="accent1"/>
             </a:fillRef>
-            <a:effectRef idx="1">
+            <a:effectRef idx="0">
               <a:schemeClr val="accent1"/>
             </a:effectRef>
             <a:fontRef idx="minor">
@@ -3706,6 +3708,7 @@
                 <a:srgbClr val="6AA7A7"/>
               </a:solidFill>
             </a:ln>
+            <a:effectLst/>
           </p:spPr>
           <p:style>
             <a:lnRef idx="2">
@@ -3714,7 +3717,7 @@
             <a:fillRef idx="0">
               <a:schemeClr val="accent1"/>
             </a:fillRef>
-            <a:effectRef idx="1">
+            <a:effectRef idx="0">
               <a:schemeClr val="accent1"/>
             </a:effectRef>
             <a:fontRef idx="minor">
@@ -3741,6 +3744,7 @@
                 <a:srgbClr val="6AA7A7"/>
               </a:solidFill>
             </a:ln>
+            <a:effectLst/>
           </p:spPr>
           <p:style>
             <a:lnRef idx="2">
@@ -3749,7 +3753,7 @@
             <a:fillRef idx="0">
               <a:schemeClr val="accent1"/>
             </a:fillRef>
-            <a:effectRef idx="1">
+            <a:effectRef idx="0">
               <a:schemeClr val="accent1"/>
             </a:effectRef>
             <a:fontRef idx="minor">
@@ -3776,6 +3780,7 @@
                 <a:srgbClr val="6AA7A7"/>
               </a:solidFill>
             </a:ln>
+            <a:effectLst/>
           </p:spPr>
           <p:style>
             <a:lnRef idx="2">
@@ -3784,7 +3789,7 @@
             <a:fillRef idx="0">
               <a:schemeClr val="accent1"/>
             </a:fillRef>
-            <a:effectRef idx="1">
+            <a:effectRef idx="0">
               <a:schemeClr val="accent1"/>
             </a:effectRef>
             <a:fontRef idx="minor">
@@ -3811,6 +3816,7 @@
                 <a:srgbClr val="6AA7A7"/>
               </a:solidFill>
             </a:ln>
+            <a:effectLst/>
           </p:spPr>
           <p:style>
             <a:lnRef idx="2">
@@ -3819,7 +3825,7 @@
             <a:fillRef idx="0">
               <a:schemeClr val="accent1"/>
             </a:fillRef>
-            <a:effectRef idx="1">
+            <a:effectRef idx="0">
               <a:schemeClr val="accent1"/>
             </a:effectRef>
             <a:fontRef idx="minor">
@@ -3846,6 +3852,7 @@
                 <a:srgbClr val="6AA7A7"/>
               </a:solidFill>
             </a:ln>
+            <a:effectLst/>
           </p:spPr>
           <p:style>
             <a:lnRef idx="2">
@@ -3854,7 +3861,7 @@
             <a:fillRef idx="0">
               <a:schemeClr val="accent1"/>
             </a:fillRef>
-            <a:effectRef idx="1">
+            <a:effectRef idx="0">
               <a:schemeClr val="accent1"/>
             </a:effectRef>
             <a:fontRef idx="minor">
@@ -3881,6 +3888,7 @@
                 <a:srgbClr val="6AA7A7"/>
               </a:solidFill>
             </a:ln>
+            <a:effectLst/>
           </p:spPr>
           <p:style>
             <a:lnRef idx="2">
@@ -3889,7 +3897,7 @@
             <a:fillRef idx="0">
               <a:schemeClr val="accent1"/>
             </a:fillRef>
-            <a:effectRef idx="1">
+            <a:effectRef idx="0">
               <a:schemeClr val="accent1"/>
             </a:effectRef>
             <a:fontRef idx="minor">
@@ -3916,6 +3924,7 @@
                 <a:srgbClr val="6AA7A7"/>
               </a:solidFill>
             </a:ln>
+            <a:effectLst/>
           </p:spPr>
           <p:style>
             <a:lnRef idx="2">
@@ -3924,7 +3933,7 @@
             <a:fillRef idx="0">
               <a:schemeClr val="accent1"/>
             </a:fillRef>
-            <a:effectRef idx="1">
+            <a:effectRef idx="0">
               <a:schemeClr val="accent1"/>
             </a:effectRef>
             <a:fontRef idx="minor">
@@ -3951,6 +3960,7 @@
                 <a:srgbClr val="6AA7A7"/>
               </a:solidFill>
             </a:ln>
+            <a:effectLst/>
           </p:spPr>
           <p:style>
             <a:lnRef idx="2">
@@ -3959,7 +3969,7 @@
             <a:fillRef idx="0">
               <a:schemeClr val="accent1"/>
             </a:fillRef>
-            <a:effectRef idx="1">
+            <a:effectRef idx="0">
               <a:schemeClr val="accent1"/>
             </a:effectRef>
             <a:fontRef idx="minor">
@@ -3986,6 +3996,7 @@
                 <a:srgbClr val="6AA7A7"/>
               </a:solidFill>
             </a:ln>
+            <a:effectLst/>
           </p:spPr>
           <p:style>
             <a:lnRef idx="2">
@@ -3994,7 +4005,7 @@
             <a:fillRef idx="0">
               <a:schemeClr val="accent1"/>
             </a:fillRef>
-            <a:effectRef idx="1">
+            <a:effectRef idx="0">
               <a:schemeClr val="accent1"/>
             </a:effectRef>
             <a:fontRef idx="minor">
@@ -4021,6 +4032,7 @@
                 <a:srgbClr val="6AA7A7"/>
               </a:solidFill>
             </a:ln>
+            <a:effectLst/>
           </p:spPr>
           <p:style>
             <a:lnRef idx="2">
@@ -4029,7 +4041,7 @@
             <a:fillRef idx="0">
               <a:schemeClr val="accent1"/>
             </a:fillRef>
-            <a:effectRef idx="1">
+            <a:effectRef idx="0">
               <a:schemeClr val="accent1"/>
             </a:effectRef>
             <a:fontRef idx="minor">
@@ -4056,6 +4068,7 @@
                 <a:srgbClr val="6AA7A7"/>
               </a:solidFill>
             </a:ln>
+            <a:effectLst/>
           </p:spPr>
           <p:style>
             <a:lnRef idx="2">
@@ -4064,7 +4077,7 @@
             <a:fillRef idx="0">
               <a:schemeClr val="accent1"/>
             </a:fillRef>
-            <a:effectRef idx="1">
+            <a:effectRef idx="0">
               <a:schemeClr val="accent1"/>
             </a:effectRef>
             <a:fontRef idx="minor">
@@ -4091,6 +4104,7 @@
                 <a:srgbClr val="6AA7A7"/>
               </a:solidFill>
             </a:ln>
+            <a:effectLst/>
           </p:spPr>
           <p:style>
             <a:lnRef idx="2">
@@ -4099,7 +4113,7 @@
             <a:fillRef idx="0">
               <a:schemeClr val="accent1"/>
             </a:fillRef>
-            <a:effectRef idx="1">
+            <a:effectRef idx="0">
               <a:schemeClr val="accent1"/>
             </a:effectRef>
             <a:fontRef idx="minor">
@@ -4126,6 +4140,7 @@
                 <a:srgbClr val="6AA7A7"/>
               </a:solidFill>
             </a:ln>
+            <a:effectLst/>
           </p:spPr>
           <p:style>
             <a:lnRef idx="2">
@@ -4134,7 +4149,7 @@
             <a:fillRef idx="0">
               <a:schemeClr val="accent1"/>
             </a:fillRef>
-            <a:effectRef idx="1">
+            <a:effectRef idx="0">
               <a:schemeClr val="accent1"/>
             </a:effectRef>
             <a:fontRef idx="minor">
@@ -4161,6 +4176,7 @@
                 <a:srgbClr val="6AA7A7"/>
               </a:solidFill>
             </a:ln>
+            <a:effectLst/>
           </p:spPr>
           <p:style>
             <a:lnRef idx="2">
@@ -4169,7 +4185,7 @@
             <a:fillRef idx="0">
               <a:schemeClr val="accent1"/>
             </a:fillRef>
-            <a:effectRef idx="1">
+            <a:effectRef idx="0">
               <a:schemeClr val="accent1"/>
             </a:effectRef>
             <a:fontRef idx="minor">

--- a/gakkyu/tegami/pptx/R2.pptx
+++ b/gakkyu/tegami/pptx/R2.pptx
@@ -3568,44 +3568,9 @@
           </a:p>
         </p:txBody>
       </p:sp>
-      <p:sp>
-        <p:nvSpPr>
-          <p:cNvPr id="3" name="名前欄"/>
-          <p:cNvSpPr txBox="1"/>
-          <p:nvPr/>
-        </p:nvSpPr>
-        <p:spPr>
-          <a:xfrm>
-            <a:off x="3600000" y="475200"/>
-            <a:ext cx="3420000" cy="252000"/>
-          </a:xfrm>
-          <a:prstGeom prst="rect">
-            <a:avLst/>
-          </a:prstGeom>
-          <a:noFill/>
-        </p:spPr>
-        <p:txBody>
-          <a:bodyPr wrap="square" lIns="0" rIns="0" tIns="0" bIns="0" anchor="t">
-            <a:spAutoFit/>
-          </a:bodyPr>
-          <a:lstStyle/>
-          <a:p>
-            <a:pPr algn="r"/>
-            <a:r>
-              <a:rPr sz="1000" b="0">
-                <a:solidFill>
-                  <a:srgbClr val="38424B"/>
-                </a:solidFill>
-                <a:latin typeface="UD デジタル 教科書体 N-R"/>
-              </a:rPr>
-              <a:t>（　　年　　組　　名前　　　　　　　　）</a:t>
-            </a:r>
-          </a:p>
-        </p:txBody>
-      </p:sp>
       <p:cxnSp>
         <p:nvCxnSpPr>
-          <p:cNvPr id="4" name="見出しの線"/>
+          <p:cNvPr id="3" name="見出しの線"/>
           <p:cNvCxnSpPr/>
           <p:nvPr/>
         </p:nvCxnSpPr>
@@ -3641,7 +3606,7 @@
       </p:cxnSp>
       <p:grpSp>
         <p:nvGrpSpPr>
-          <p:cNvPr id="5" name="けい線（よこ）"/>
+          <p:cNvPr id="4" name="けい線（よこ）"/>
           <p:cNvGrpSpPr/>
           <p:nvPr/>
         </p:nvGrpSpPr>
@@ -3655,7 +3620,7 @@
         </p:grpSpPr>
         <p:cxnSp>
           <p:nvCxnSpPr>
-            <p:cNvPr id="6" name="よこ線 1"/>
+            <p:cNvPr id="5" name="よこ線 1"/>
             <p:cNvCxnSpPr/>
             <p:nvPr/>
           </p:nvCxnSpPr>
@@ -3691,7 +3656,7 @@
         </p:cxnSp>
         <p:cxnSp>
           <p:nvCxnSpPr>
-            <p:cNvPr id="7" name="よこ線 2"/>
+            <p:cNvPr id="6" name="よこ線 2"/>
             <p:cNvCxnSpPr/>
             <p:nvPr/>
           </p:nvCxnSpPr>
@@ -3727,7 +3692,7 @@
         </p:cxnSp>
         <p:cxnSp>
           <p:nvCxnSpPr>
-            <p:cNvPr id="8" name="よこ線 3"/>
+            <p:cNvPr id="7" name="よこ線 3"/>
             <p:cNvCxnSpPr/>
             <p:nvPr/>
           </p:nvCxnSpPr>
@@ -3763,7 +3728,7 @@
         </p:cxnSp>
         <p:cxnSp>
           <p:nvCxnSpPr>
-            <p:cNvPr id="9" name="よこ線 4"/>
+            <p:cNvPr id="8" name="よこ線 4"/>
             <p:cNvCxnSpPr/>
             <p:nvPr/>
           </p:nvCxnSpPr>
@@ -3799,7 +3764,7 @@
         </p:cxnSp>
         <p:cxnSp>
           <p:nvCxnSpPr>
-            <p:cNvPr id="10" name="よこ線 5"/>
+            <p:cNvPr id="9" name="よこ線 5"/>
             <p:cNvCxnSpPr/>
             <p:nvPr/>
           </p:nvCxnSpPr>
@@ -3835,7 +3800,7 @@
         </p:cxnSp>
         <p:cxnSp>
           <p:nvCxnSpPr>
-            <p:cNvPr id="11" name="よこ線 6"/>
+            <p:cNvPr id="10" name="よこ線 6"/>
             <p:cNvCxnSpPr/>
             <p:nvPr/>
           </p:nvCxnSpPr>
@@ -3871,7 +3836,7 @@
         </p:cxnSp>
         <p:cxnSp>
           <p:nvCxnSpPr>
-            <p:cNvPr id="12" name="よこ線 7"/>
+            <p:cNvPr id="11" name="よこ線 7"/>
             <p:cNvCxnSpPr/>
             <p:nvPr/>
           </p:nvCxnSpPr>
@@ -3907,7 +3872,7 @@
         </p:cxnSp>
         <p:cxnSp>
           <p:nvCxnSpPr>
-            <p:cNvPr id="13" name="よこ線 8"/>
+            <p:cNvPr id="12" name="よこ線 8"/>
             <p:cNvCxnSpPr/>
             <p:nvPr/>
           </p:nvCxnSpPr>
@@ -3943,7 +3908,7 @@
         </p:cxnSp>
         <p:cxnSp>
           <p:nvCxnSpPr>
-            <p:cNvPr id="14" name="よこ線 9"/>
+            <p:cNvPr id="13" name="よこ線 9"/>
             <p:cNvCxnSpPr/>
             <p:nvPr/>
           </p:nvCxnSpPr>
@@ -3979,7 +3944,7 @@
         </p:cxnSp>
         <p:cxnSp>
           <p:nvCxnSpPr>
-            <p:cNvPr id="15" name="よこ線 10"/>
+            <p:cNvPr id="14" name="よこ線 10"/>
             <p:cNvCxnSpPr/>
             <p:nvPr/>
           </p:nvCxnSpPr>
@@ -4015,7 +3980,7 @@
         </p:cxnSp>
         <p:cxnSp>
           <p:nvCxnSpPr>
-            <p:cNvPr id="16" name="よこ線 11"/>
+            <p:cNvPr id="15" name="よこ線 11"/>
             <p:cNvCxnSpPr/>
             <p:nvPr/>
           </p:nvCxnSpPr>
@@ -4051,7 +4016,7 @@
         </p:cxnSp>
         <p:cxnSp>
           <p:nvCxnSpPr>
-            <p:cNvPr id="17" name="よこ線 12"/>
+            <p:cNvPr id="16" name="よこ線 12"/>
             <p:cNvCxnSpPr/>
             <p:nvPr/>
           </p:nvCxnSpPr>
@@ -4087,7 +4052,7 @@
         </p:cxnSp>
         <p:cxnSp>
           <p:nvCxnSpPr>
-            <p:cNvPr id="18" name="よこ線 13"/>
+            <p:cNvPr id="17" name="よこ線 13"/>
             <p:cNvCxnSpPr/>
             <p:nvPr/>
           </p:nvCxnSpPr>
@@ -4123,7 +4088,7 @@
         </p:cxnSp>
         <p:cxnSp>
           <p:nvCxnSpPr>
-            <p:cNvPr id="19" name="よこ線 14"/>
+            <p:cNvPr id="18" name="よこ線 14"/>
             <p:cNvCxnSpPr/>
             <p:nvPr/>
           </p:nvCxnSpPr>
@@ -4159,7 +4124,7 @@
         </p:cxnSp>
         <p:cxnSp>
           <p:nvCxnSpPr>
-            <p:cNvPr id="20" name="よこ線 15"/>
+            <p:cNvPr id="19" name="よこ線 15"/>
             <p:cNvCxnSpPr/>
             <p:nvPr/>
           </p:nvCxnSpPr>
@@ -4196,7 +4161,7 @@
       </p:grpSp>
       <p:pic>
         <p:nvPicPr>
-          <p:cNvPr id="21" name="さし絵（消してもかまいません）" descr="_tmp_ill.png"/>
+          <p:cNvPr id="20" name="さし絵（消してもかまいません）" descr="_tmp_ill.png"/>
           <p:cNvPicPr>
             <a:picLocks noChangeAspect="1"/>
           </p:cNvPicPr>
@@ -4220,7 +4185,7 @@
       </p:pic>
       <p:sp>
         <p:nvSpPr>
-          <p:cNvPr id="22" name="紙の説明（消してもかまいません）"/>
+          <p:cNvPr id="21" name="紙の説明（消してもかまいません）"/>
           <p:cNvSpPr txBox="1"/>
           <p:nvPr/>
         </p:nvSpPr>
@@ -4255,7 +4220,7 @@
       </p:sp>
       <p:sp>
         <p:nvSpPr>
-          <p:cNvPr id="23" name="クレジット"/>
+          <p:cNvPr id="22" name="クレジット"/>
           <p:cNvSpPr txBox="1"/>
           <p:nvPr/>
         </p:nvSpPr>
